--- a/Deliverables/CS 26-335_Poster.pptx
+++ b/Deliverables/CS 26-335_Poster.pptx
@@ -1034,7 +1034,7 @@
               <a:rPr lang="en"/>
               <a:t>‹#›</a:t>
             </a:fld>
-            <a:endParaRPr/>
+            <a:endParaRPr dirty="0"/>
           </a:p>
         </p:txBody>
       </p:sp>
@@ -1138,7 +1138,7 @@
               <a:rPr lang="en"/>
               <a:t>‹#›</a:t>
             </a:fld>
-            <a:endParaRPr/>
+            <a:endParaRPr dirty="0"/>
           </a:p>
         </p:txBody>
       </p:sp>
@@ -1500,7 +1500,7 @@
               <a:rPr lang="en"/>
               <a:t>‹#›</a:t>
             </a:fld>
-            <a:endParaRPr/>
+            <a:endParaRPr dirty="0"/>
           </a:p>
         </p:txBody>
       </p:sp>
@@ -1991,7 +1991,7 @@
               <a:rPr lang="en"/>
               <a:t>‹#›</a:t>
             </a:fld>
-            <a:endParaRPr/>
+            <a:endParaRPr dirty="0"/>
           </a:p>
         </p:txBody>
       </p:sp>
@@ -2224,7 +2224,7 @@
               <a:rPr lang="en"/>
               <a:t>‹#›</a:t>
             </a:fld>
-            <a:endParaRPr/>
+            <a:endParaRPr dirty="0"/>
           </a:p>
         </p:txBody>
       </p:sp>
@@ -2586,7 +2586,7 @@
               <a:rPr lang="en"/>
               <a:t>‹#›</a:t>
             </a:fld>
-            <a:endParaRPr/>
+            <a:endParaRPr dirty="0"/>
           </a:p>
         </p:txBody>
       </p:sp>
@@ -2819,7 +2819,7 @@
               <a:rPr lang="en"/>
               <a:t>‹#›</a:t>
             </a:fld>
-            <a:endParaRPr/>
+            <a:endParaRPr dirty="0"/>
           </a:p>
         </p:txBody>
       </p:sp>
@@ -2884,7 +2884,7 @@
               </a:spcAft>
               <a:buNone/>
             </a:pPr>
-            <a:endParaRPr/>
+            <a:endParaRPr dirty="0"/>
           </a:p>
         </p:txBody>
       </p:sp>
@@ -3377,7 +3377,7 @@
               <a:rPr lang="en"/>
               <a:t>‹#›</a:t>
             </a:fld>
-            <a:endParaRPr/>
+            <a:endParaRPr dirty="0"/>
           </a:p>
         </p:txBody>
       </p:sp>
@@ -3525,7 +3525,7 @@
               <a:rPr lang="en"/>
               <a:t>‹#›</a:t>
             </a:fld>
-            <a:endParaRPr/>
+            <a:endParaRPr dirty="0"/>
           </a:p>
         </p:txBody>
       </p:sp>
@@ -3889,7 +3889,7 @@
               <a:rPr lang="en"/>
               <a:t>‹#›</a:t>
             </a:fld>
-            <a:endParaRPr/>
+            <a:endParaRPr dirty="0"/>
           </a:p>
         </p:txBody>
       </p:sp>
@@ -4460,7 +4460,7 @@
               <a:rPr lang="en"/>
               <a:t>‹#›</a:t>
             </a:fld>
-            <a:endParaRPr/>
+            <a:endParaRPr dirty="0"/>
           </a:p>
         </p:txBody>
       </p:sp>
@@ -5217,7 +5217,7 @@
           <p:nvPr>
             <p:extLst>
               <p:ext uri="{D42A27DB-BD31-4B8C-83A1-F6EECF244321}">
-                <p14:modId xmlns:p14="http://schemas.microsoft.com/office/powerpoint/2010/main" val="4252758975"/>
+                <p14:modId xmlns:p14="http://schemas.microsoft.com/office/powerpoint/2010/main" val="3586993605"/>
               </p:ext>
             </p:extLst>
           </p:nvPr>
@@ -5269,12 +5269,8 @@
                         <a:t>Genomic Pattern Analysis: </a:t>
                       </a:r>
                       <a:r>
-                        <a:rPr lang="en-US" sz="2800" b="0" dirty="0" err="1"/>
-                        <a:t>EcoRI</a:t>
-                      </a:r>
-                      <a:r>
                         <a:rPr lang="en-US" sz="2800" b="0" dirty="0"/>
-                        <a:t> Restriction Site Identification</a:t>
+                        <a:t>EcoRI Restriction Site Identification</a:t>
                       </a:r>
                       <a:endParaRPr lang="en-US" sz="2800" b="0" u="none" dirty="0"/>
                     </a:p>
@@ -5286,23 +5282,7 @@
                       <a:pPr algn="ctr"/>
                       <a:r>
                         <a:rPr lang="en-US" sz="2800" b="1" u="none" dirty="0"/>
-                        <a:t>python3 </a:t>
-                      </a:r>
-                      <a:r>
-                        <a:rPr lang="en-US" sz="2800" b="1" u="none" dirty="0" err="1"/>
-                        <a:t>main.py</a:t>
-                      </a:r>
-                      <a:r>
-                        <a:rPr lang="en-US" sz="2800" b="1" u="none" dirty="0"/>
-                        <a:t> input/</a:t>
-                      </a:r>
-                      <a:r>
-                        <a:rPr lang="en-US" sz="2800" b="1" u="none" dirty="0" err="1"/>
-                        <a:t>sequences.fasta</a:t>
-                      </a:r>
-                      <a:r>
-                        <a:rPr lang="en-US" sz="2800" b="1" u="none" dirty="0"/>
-                        <a:t> </a:t>
+                        <a:t>python3 main.py input/sequences.fasta </a:t>
                       </a:r>
                     </a:p>
                     <a:p>
@@ -5328,23 +5308,7 @@
                             <a:schemeClr val="accent1"/>
                           </a:solidFill>
                         </a:rPr>
-                        <a:t>  </a:t>
-                      </a:r>
-                      <a:r>
-                        <a:rPr lang="en-US" sz="2800" b="1" u="none" dirty="0" err="1">
-                          <a:solidFill>
-                            <a:schemeClr val="accent1"/>
-                          </a:solidFill>
-                        </a:rPr>
-                        <a:t>BioAgent</a:t>
-                      </a:r>
-                      <a:r>
-                        <a:rPr lang="en-US" sz="2800" b="1" u="none" dirty="0">
-                          <a:solidFill>
-                            <a:schemeClr val="accent1"/>
-                          </a:solidFill>
-                        </a:rPr>
-                        <a:t> - Multi-Agent LLM Analysis System</a:t>
+                        <a:t>  BioAgent - Multi-Agent LLM Analysis System</a:t>
                       </a:r>
                     </a:p>
                     <a:p>
@@ -5381,13 +5345,8 @@
                       <a:pPr algn="ctr"/>
                       <a:r>
                         <a:rPr lang="en-US" sz="2800" b="1" u="none" dirty="0"/>
-                        <a:t>File: </a:t>
+                        <a:t>File: sequences.fasta</a:t>
                       </a:r>
-                      <a:r>
-                        <a:rPr lang="en-US" sz="2800" b="1" u="none" dirty="0" err="1"/>
-                        <a:t>sequences.fasta</a:t>
-                      </a:r>
-                      <a:endParaRPr lang="en-US" sz="2800" b="1" u="none" dirty="0"/>
                     </a:p>
                     <a:p>
                       <a:pPr algn="ctr"/>
@@ -5450,23 +5409,7 @@
                       <a:pPr algn="ctr"/>
                       <a:r>
                         <a:rPr lang="en-US" sz="2800" b="1" u="none" dirty="0"/>
-                        <a:t>&gt; Write a Python function that reads a </a:t>
-                      </a:r>
-                      <a:r>
-                        <a:rPr lang="en-US" sz="2800" b="1" u="none" dirty="0" err="1"/>
-                        <a:t>sequences.fasta</a:t>
-                      </a:r>
-                      <a:r>
-                        <a:rPr lang="en-US" sz="2800" b="1" u="none" dirty="0"/>
-                        <a:t> file and identifies sequences containing the </a:t>
-                      </a:r>
-                      <a:r>
-                        <a:rPr lang="en-US" sz="2800" b="1" u="none" dirty="0" err="1"/>
-                        <a:t>EcoRI</a:t>
-                      </a:r>
-                      <a:r>
-                        <a:rPr lang="en-US" sz="2800" b="1" u="none" dirty="0"/>
-                        <a:t> restriction site ("GAATTC"), returning the sequence IDs and positions of the sites for downstream genetic analysis.</a:t>
+                        <a:t>&gt; Write a Python function that reads a sequences.fasta file and identifies sequences containing the EcoRI restriction site ("GAATTC"), returning the sequence IDs and positions of the sites for downstream genetic analysis.</a:t>
                       </a:r>
                     </a:p>
                     <a:p>
@@ -5523,31 +5466,7 @@
                       <a:pPr algn="ctr"/>
                       <a:r>
                         <a:rPr lang="en-US" sz="2800" b="1" u="none" dirty="0"/>
-                        <a:t>Final query: Write a Python function that reads a </a:t>
-                      </a:r>
-                      <a:r>
-                        <a:rPr lang="en-US" sz="2800" b="1" u="none" dirty="0" err="1"/>
-                        <a:t>sequences.fasta</a:t>
-                      </a:r>
-                      <a:r>
-                        <a:rPr lang="en-US" sz="2800" b="1" u="none" dirty="0"/>
-                        <a:t> file and identifies sequences containing the </a:t>
-                      </a:r>
-                      <a:r>
-                        <a:rPr lang="en-US" sz="2800" b="1" u="none" dirty="0" err="1"/>
-                        <a:t>EcoRI</a:t>
-                      </a:r>
-                      <a:r>
-                        <a:rPr lang="en-US" sz="2800" b="1" u="none" dirty="0"/>
-                        <a:t> restriction site ("GAATTC"), returning the sequence IDs and positions of the sites for downstream genetic analysis. The input file is </a:t>
-                      </a:r>
-                      <a:r>
-                        <a:rPr lang="en-US" sz="2800" b="1" u="none" dirty="0" err="1"/>
-                        <a:t>sequences.fasta</a:t>
-                      </a:r>
-                      <a:r>
-                        <a:rPr lang="en-US" sz="2800" b="1" u="none" dirty="0"/>
-                        <a:t>.</a:t>
+                        <a:t>Final query: Write a Python function that reads a sequences.fasta file and identifies sequences containing the EcoRI restriction site ("GAATTC"), returning the sequence IDs and positions of the sites for downstream genetic analysis. The input file is sequences.fasta.</a:t>
                       </a:r>
                     </a:p>
                     <a:p>
@@ -5730,60 +5649,28 @@
                       <a:pPr algn="ctr"/>
                       <a:r>
                         <a:rPr lang="en-US" sz="2800" b="1" u="none" dirty="0"/>
-                        <a:t>Sequence ID: seq1, </a:t>
-                      </a:r>
-                      <a:r>
-                        <a:rPr lang="en-US" sz="2800" b="1" u="none" dirty="0" err="1"/>
-                        <a:t>EcoRI</a:t>
-                      </a:r>
-                      <a:r>
-                        <a:rPr lang="en-US" sz="2800" b="1" u="none" dirty="0"/>
-                        <a:t> sites: [11, 34]</a:t>
+                        <a:t>Sequence ID: seq1, EcoRI sites: [11, 34]</a:t>
                       </a:r>
                     </a:p>
                     <a:p>
                       <a:pPr algn="ctr"/>
                       <a:r>
                         <a:rPr lang="en-US" sz="2800" b="1" u="none" dirty="0"/>
-                        <a:t>Sequence ID: seq2, </a:t>
-                      </a:r>
-                      <a:r>
-                        <a:rPr lang="en-US" sz="2800" b="1" u="none" dirty="0" err="1"/>
-                        <a:t>EcoRI</a:t>
-                      </a:r>
-                      <a:r>
-                        <a:rPr lang="en-US" sz="2800" b="1" u="none" dirty="0"/>
-                        <a:t> sites: [14]</a:t>
+                        <a:t>Sequence ID: seq2, EcoRI sites: [14]</a:t>
                       </a:r>
                     </a:p>
                     <a:p>
                       <a:pPr algn="ctr"/>
                       <a:r>
                         <a:rPr lang="en-US" sz="2800" b="1" u="none" dirty="0"/>
-                        <a:t>Sequence ID: seq3, </a:t>
-                      </a:r>
-                      <a:r>
-                        <a:rPr lang="en-US" sz="2800" b="1" u="none" dirty="0" err="1"/>
-                        <a:t>EcoRI</a:t>
-                      </a:r>
-                      <a:r>
-                        <a:rPr lang="en-US" sz="2800" b="1" u="none" dirty="0"/>
-                        <a:t> sites: [12]</a:t>
+                        <a:t>Sequence ID: seq3, EcoRI sites: [12]</a:t>
                       </a:r>
                     </a:p>
                     <a:p>
                       <a:pPr algn="ctr"/>
                       <a:r>
                         <a:rPr lang="en-US" sz="2800" b="1" u="none" dirty="0"/>
-                        <a:t>Sequence ID: seq4, </a:t>
-                      </a:r>
-                      <a:r>
-                        <a:rPr lang="en-US" sz="2800" b="1" u="none" dirty="0" err="1"/>
-                        <a:t>EcoRI</a:t>
-                      </a:r>
-                      <a:r>
-                        <a:rPr lang="en-US" sz="2800" b="1" u="none" dirty="0"/>
-                        <a:t> sites: [16]</a:t>
+                        <a:t>Sequence ID: seq4, EcoRI sites: [16]</a:t>
                       </a:r>
                     </a:p>
                   </a:txBody>
@@ -6003,31 +5890,7 @@
                 <a:cs typeface="Arial"/>
                 <a:sym typeface="Arial"/>
               </a:rPr>
-              <a:t>Carter Struck, </a:t>
-            </a:r>
-            <a:r>
-              <a:rPr lang="en-US" sz="3600" i="0" u="none" strike="noStrike" cap="none" dirty="0" err="1">
-                <a:solidFill>
-                  <a:srgbClr val="3C3C3B"/>
-                </a:solidFill>
-                <a:latin typeface="Arial"/>
-                <a:ea typeface="Arial"/>
-                <a:cs typeface="Arial"/>
-                <a:sym typeface="Arial"/>
-              </a:rPr>
-              <a:t>Ozi</a:t>
-            </a:r>
-            <a:r>
-              <a:rPr lang="en-US" sz="3600" i="0" u="none" strike="noStrike" cap="none" dirty="0">
-                <a:solidFill>
-                  <a:srgbClr val="3C3C3B"/>
-                </a:solidFill>
-                <a:latin typeface="Arial"/>
-                <a:ea typeface="Arial"/>
-                <a:cs typeface="Arial"/>
-                <a:sym typeface="Arial"/>
-              </a:rPr>
-              <a:t> Jawad, Mack Hicks, Sona James</a:t>
+              <a:t>Carter Struck, Ozi Jawad, Mack Hicks, Sona James</a:t>
             </a:r>
             <a:r>
               <a:rPr lang="en-US" sz="3600" b="0" i="0" u="none" strike="noStrike" cap="none" dirty="0">
@@ -6063,31 +5926,7 @@
                 <a:cs typeface="Arial"/>
                 <a:sym typeface="Arial"/>
               </a:rPr>
-              <a:t>Tomasz </a:t>
-            </a:r>
-            <a:r>
-              <a:rPr lang="en-US" sz="3600" dirty="0" err="1">
-                <a:solidFill>
-                  <a:srgbClr val="3C3C3B"/>
-                </a:solidFill>
-                <a:latin typeface="Arial"/>
-                <a:ea typeface="Arial"/>
-                <a:cs typeface="Arial"/>
-                <a:sym typeface="Arial"/>
-              </a:rPr>
-              <a:t>Arodz</a:t>
-            </a:r>
-            <a:r>
-              <a:rPr lang="en-US" sz="3600" dirty="0">
-                <a:solidFill>
-                  <a:srgbClr val="3C3C3B"/>
-                </a:solidFill>
-                <a:latin typeface="Arial"/>
-                <a:ea typeface="Arial"/>
-                <a:cs typeface="Arial"/>
-                <a:sym typeface="Arial"/>
-              </a:rPr>
-              <a:t>, Ph.D.</a:t>
+              <a:t>Tomasz Arodz, Ph.D.</a:t>
             </a:r>
             <a:r>
               <a:rPr lang="en-US" sz="3600" b="0" i="0" u="none" strike="noStrike" cap="none" dirty="0">
@@ -6147,43 +5986,7 @@
                 <a:cs typeface="Arial"/>
                 <a:sym typeface="Arial"/>
               </a:rPr>
-              <a:t>Tomasz </a:t>
-            </a:r>
-            <a:r>
-              <a:rPr lang="en-US" sz="3600" i="0" u="none" strike="noStrike" cap="none" dirty="0" err="1">
-                <a:solidFill>
-                  <a:srgbClr val="3C3C3B"/>
-                </a:solidFill>
-                <a:latin typeface="Arial"/>
-                <a:ea typeface="Arial"/>
-                <a:cs typeface="Arial"/>
-                <a:sym typeface="Arial"/>
-              </a:rPr>
-              <a:t>Arodz</a:t>
-            </a:r>
-            <a:r>
-              <a:rPr lang="en-US" sz="3600" i="0" u="none" strike="noStrike" cap="none" dirty="0">
-                <a:solidFill>
-                  <a:srgbClr val="3C3C3B"/>
-                </a:solidFill>
-                <a:latin typeface="Arial"/>
-                <a:ea typeface="Arial"/>
-                <a:cs typeface="Arial"/>
-                <a:sym typeface="Arial"/>
-              </a:rPr>
-              <a:t>, </a:t>
-            </a:r>
-            <a:r>
-              <a:rPr lang="en-US" sz="3600" i="0" u="none" strike="noStrike" cap="none" dirty="0" err="1">
-                <a:solidFill>
-                  <a:srgbClr val="3C3C3B"/>
-                </a:solidFill>
-                <a:latin typeface="Arial"/>
-                <a:ea typeface="Arial"/>
-                <a:cs typeface="Arial"/>
-                <a:sym typeface="Arial"/>
-              </a:rPr>
-              <a:t>Ph.D</a:t>
+              <a:t>Tomasz Arodz, Ph.D</a:t>
             </a:r>
             <a:r>
               <a:rPr lang="en-US" sz="4800" b="0" i="0" u="none" strike="noStrike" cap="none" dirty="0">
@@ -6324,7 +6127,7 @@
             </a:pPr>
             <a:r>
               <a:rPr lang="en-US" sz="3600" dirty="0"/>
-              <a:t>Model must run on a single NVDIA A100 GPU 40GB VRAM provided by VCU.</a:t>
+              <a:t>Model must run on a single NVIDIA A100 GPU 40GB VRAM provided by VCU.</a:t>
             </a:r>
           </a:p>
           <a:p>
@@ -6344,7 +6147,7 @@
             </a:pPr>
             <a:r>
               <a:rPr lang="en-US" sz="3600" dirty="0"/>
-              <a:t>Open Source, permissively license models only.</a:t>
+              <a:t>Open Source, permissively licensed models only.</a:t>
             </a:r>
           </a:p>
           <a:p>
@@ -6413,7 +6216,7 @@
             </a:pPr>
             <a:r>
               <a:rPr lang="en-US" sz="3600" dirty="0"/>
-              <a:t>Llama 3.1 Pro Coder (8B parameters) powers bot the Writer and Coder agents.</a:t>
+              <a:t>Llama 3.1 Pro Coder (8B parameters) powers both the Writer and Coder agents.</a:t>
             </a:r>
           </a:p>
           <a:p>
@@ -6433,15 +6236,7 @@
             </a:pPr>
             <a:r>
               <a:rPr lang="en-US" sz="3600" dirty="0"/>
-              <a:t>NF4 4-bit quantization via </a:t>
-            </a:r>
-            <a:r>
-              <a:rPr lang="en-US" sz="3600" dirty="0" err="1"/>
-              <a:t>BitsAndBytes</a:t>
-            </a:r>
-            <a:r>
-              <a:rPr lang="en-US" sz="3600" dirty="0"/>
-              <a:t> cuts memory usage ~75%.</a:t>
+              <a:t>NF4 4-bit quantization via BitsAndBytes cuts memory usage ~75%.</a:t>
             </a:r>
           </a:p>
           <a:p>
@@ -6451,15 +6246,7 @@
             </a:pPr>
             <a:r>
               <a:rPr lang="en-US" sz="3600" dirty="0"/>
-              <a:t>Python as the target language for its dominance in bioinformatics (</a:t>
-            </a:r>
-            <a:r>
-              <a:rPr lang="en-US" sz="3600" dirty="0" err="1"/>
-              <a:t>Biopython</a:t>
-            </a:r>
-            <a:r>
-              <a:rPr lang="en-US" sz="3600" dirty="0"/>
-              <a:t>, pandas, NumPy).</a:t>
+              <a:t>Python as the target language for its dominance in bioinformatics (Biopython, pandas, NumPy).</a:t>
             </a:r>
           </a:p>
           <a:p>
@@ -6683,7 +6470,10 @@
           <a:lstStyle/>
           <a:p>
             <a:r>
-              <a:rPr lang="en-US" sz="4800" b="1" dirty="0"/>
+              <a:rPr lang="en-US" sz="4800" b="1" dirty="0">
+                <a:latin typeface="Arial" panose="020B0604020202020204" pitchFamily="34" charset="0"/>
+                <a:cs typeface="Arial" panose="020B0604020202020204" pitchFamily="34" charset="0"/>
+              </a:rPr>
               <a:t>Design Constraints</a:t>
             </a:r>
           </a:p>
@@ -6731,7 +6521,10 @@
           <a:lstStyle/>
           <a:p>
             <a:r>
-              <a:rPr lang="en-US" sz="4800" b="1" dirty="0"/>
+              <a:rPr lang="en-US" sz="4800" b="1" dirty="0">
+                <a:latin typeface="Arial" panose="020B0604020202020204" pitchFamily="34" charset="0"/>
+                <a:cs typeface="Arial" panose="020B0604020202020204" pitchFamily="34" charset="0"/>
+              </a:rPr>
               <a:t>Implementation Choices</a:t>
             </a:r>
           </a:p>
@@ -6779,7 +6572,10 @@
           <a:lstStyle/>
           <a:p>
             <a:r>
-              <a:rPr lang="en-US" sz="4800" b="1" dirty="0"/>
+              <a:rPr lang="en-US" sz="4800" b="1" dirty="0">
+                <a:latin typeface="Arial" panose="020B0604020202020204" pitchFamily="34" charset="0"/>
+                <a:cs typeface="Arial" panose="020B0604020202020204" pitchFamily="34" charset="0"/>
+              </a:rPr>
               <a:t>Final Design</a:t>
             </a:r>
           </a:p>
@@ -6827,7 +6623,10 @@
           <a:lstStyle/>
           <a:p>
             <a:r>
-              <a:rPr lang="en-US" sz="4800" b="1" dirty="0"/>
+              <a:rPr lang="en-US" sz="4800" b="1" dirty="0">
+                <a:latin typeface="Arial" panose="020B0604020202020204" pitchFamily="34" charset="0"/>
+                <a:cs typeface="Arial" panose="020B0604020202020204" pitchFamily="34" charset="0"/>
+              </a:rPr>
               <a:t>Example System Execution </a:t>
             </a:r>
           </a:p>
@@ -6952,7 +6751,10 @@
           <a:lstStyle/>
           <a:p>
             <a:r>
-              <a:rPr lang="en-US" sz="4800" b="1" dirty="0"/>
+              <a:rPr lang="en-US" sz="4800" b="1" dirty="0">
+                <a:latin typeface="Arial" panose="020B0604020202020204" pitchFamily="34" charset="0"/>
+                <a:cs typeface="Arial" panose="020B0604020202020204" pitchFamily="34" charset="0"/>
+              </a:rPr>
               <a:t>Limitations</a:t>
             </a:r>
           </a:p>
@@ -7012,7 +6814,7 @@
             </a:pPr>
             <a:r>
               <a:rPr lang="en-US" sz="3600" dirty="0"/>
-              <a:t>Limited to single-file inputs; multi-file or pipeline workflows are not supported</a:t>
+              <a:t>Limited to single-file inputs; multi-file or pipeline workflows are not supported.</a:t>
             </a:r>
           </a:p>
           <a:p>
@@ -7080,7 +6882,10 @@
           <a:lstStyle/>
           <a:p>
             <a:r>
-              <a:rPr lang="en-US" sz="4800" b="1" dirty="0"/>
+              <a:rPr lang="en-US" sz="4800" b="1" dirty="0">
+                <a:latin typeface="Arial" panose="020B0604020202020204" pitchFamily="34" charset="0"/>
+                <a:cs typeface="Arial" panose="020B0604020202020204" pitchFamily="34" charset="0"/>
+              </a:rPr>
               <a:t>How to Run</a:t>
             </a:r>
           </a:p>
@@ -7120,15 +6925,7 @@
             </a:pPr>
             <a:r>
               <a:rPr lang="en-US" sz="3600" dirty="0"/>
-              <a:t>Place your data file in the input/ folder and run:                      python3 main.py input/&lt;</a:t>
-            </a:r>
-            <a:r>
-              <a:rPr lang="en-US" sz="3600" dirty="0" err="1"/>
-              <a:t>your_file</a:t>
-            </a:r>
-            <a:r>
-              <a:rPr lang="en-US" sz="3600" dirty="0"/>
-              <a:t>&gt;</a:t>
+              <a:t>Place your data file in the input/ folder and run:                      python3 main.py input/&lt;your_file&gt;</a:t>
             </a:r>
           </a:p>
           <a:p>
@@ -7138,7 +6935,7 @@
             </a:pPr>
             <a:r>
               <a:rPr lang="en-US" sz="3600" dirty="0"/>
-              <a:t>Select a preset analysis or describe or own.</a:t>
+              <a:t>Select a preset analysis or describe your own.</a:t>
             </a:r>
           </a:p>
           <a:p>
@@ -7148,7 +6945,7 @@
             </a:pPr>
             <a:r>
               <a:rPr lang="en-US" sz="3600" dirty="0"/>
-              <a:t>Results display in the terminal and the generate script saves to output/solution.py</a:t>
+              <a:t>Results display in the terminal and the generated script saves to output/solution.py</a:t>
             </a:r>
           </a:p>
         </p:txBody>
